--- a/slides/T320_Redes_Neurais_Artificiais (Parte IV).pptx
+++ b/slides/T320_Redes_Neurais_Artificiais (Parte IV).pptx
@@ -259,7 +259,7 @@
           <a:p>
             <a:fld id="{C3C82C08-3EFC-4473-8294-F0E229C19EFF}" type="datetimeFigureOut">
               <a:rPr lang="pt-BR" smtClean="0"/>
-              <a:t>25/11/2025</a:t>
+              <a:t>30/05/2026</a:t>
             </a:fld>
             <a:endParaRPr lang="pt-BR"/>
           </a:p>
@@ -418,7 +418,7 @@
           <a:p>
             <a:fld id="{F430A2A4-8C14-4B1A-AD48-7B6401078BF7}" type="slidenum">
               <a:rPr lang="pt-BR" smtClean="0"/>
-              <a:t>‹#›</a:t>
+              <a:t>‹nº›</a:t>
             </a:fld>
             <a:endParaRPr lang="pt-BR"/>
           </a:p>
@@ -656,8 +656,28 @@
           <a:lstStyle/>
           <a:p>
             <a:r>
-              <a:rPr lang="pt-BR" dirty="0"/>
-              <a:t>Uma heurística é uma técnica de solução de problemas que utiliza métodos práticos e não necessariamente perfeitos ou ótimos para produzir soluções satisfatórias em um tempo razoável. </a:t>
+              <a:rPr lang="pt-BR" dirty="0" smtClean="0"/>
+              <a:t>Exemplo: </a:t>
+            </a:r>
+            <a:r>
+              <a:rPr lang="pt-BR" dirty="0" smtClean="0">
+                <a:hlinkClick r:id="rId3"/>
+              </a:rPr>
+              <a:t>https://www.deeplearning.ai/ai-notes/initialization/index.html</a:t>
+            </a:r>
+            <a:endParaRPr lang="pt-BR" dirty="0" smtClean="0"/>
+          </a:p>
+          <a:p>
+            <a:endParaRPr lang="pt-BR" dirty="0" smtClean="0"/>
+          </a:p>
+          <a:p>
+            <a:r>
+              <a:rPr lang="pt-BR" dirty="0" smtClean="0"/>
+              <a:t>Uma </a:t>
+            </a:r>
+            <a:r>
+              <a:rPr lang="pt-BR" dirty="0"/>
+              <a:t>heurística é uma técnica de solução de problemas que utiliza métodos práticos e não necessariamente perfeitos ou ótimos para produzir soluções satisfatórias em um tempo razoável. </a:t>
             </a:r>
             <a:endParaRPr lang="en-US" sz="1200" b="0" i="0" kern="1200" dirty="0">
               <a:solidFill>
@@ -897,6 +917,84 @@
               <a:defRPr/>
             </a:pPr>
             <a:r>
+              <a:rPr lang="pt-BR" b="0" i="0" dirty="0" smtClean="0">
+                <a:solidFill>
+                  <a:srgbClr val="374151"/>
+                </a:solidFill>
+                <a:effectLst/>
+                <a:latin typeface="Söhne"/>
+              </a:rPr>
+              <a:t>Exemplo: </a:t>
+            </a:r>
+            <a:r>
+              <a:rPr lang="pt-BR" dirty="0" smtClean="0">
+                <a:hlinkClick r:id="rId3"/>
+              </a:rPr>
+              <a:t>https://www.deeplearning.ai/ai-notes/initialization/index.html</a:t>
+            </a:r>
+            <a:endParaRPr lang="pt-BR" b="0" i="0" dirty="0" smtClean="0">
+              <a:solidFill>
+                <a:srgbClr val="374151"/>
+              </a:solidFill>
+              <a:effectLst/>
+              <a:latin typeface="Söhne"/>
+            </a:endParaRPr>
+          </a:p>
+          <a:p>
+            <a:pPr marL="0" marR="0" lvl="0" indent="0" algn="l" defTabSz="914400" rtl="0" eaLnBrk="1" fontAlgn="auto" latinLnBrk="0" hangingPunct="1">
+              <a:lnSpc>
+                <a:spcPct val="100000"/>
+              </a:lnSpc>
+              <a:spcBef>
+                <a:spcPts val="0"/>
+              </a:spcBef>
+              <a:spcAft>
+                <a:spcPts val="0"/>
+              </a:spcAft>
+              <a:buClrTx/>
+              <a:buSzTx/>
+              <a:buFontTx/>
+              <a:buNone/>
+              <a:tabLst/>
+              <a:defRPr/>
+            </a:pPr>
+            <a:endParaRPr lang="pt-BR" b="0" i="0" dirty="0" smtClean="0">
+              <a:solidFill>
+                <a:srgbClr val="374151"/>
+              </a:solidFill>
+              <a:effectLst/>
+              <a:latin typeface="Söhne"/>
+            </a:endParaRPr>
+          </a:p>
+          <a:p>
+            <a:pPr marL="0" marR="0" lvl="0" indent="0" algn="l" defTabSz="914400" rtl="0" eaLnBrk="1" fontAlgn="auto" latinLnBrk="0" hangingPunct="1">
+              <a:lnSpc>
+                <a:spcPct val="100000"/>
+              </a:lnSpc>
+              <a:spcBef>
+                <a:spcPts val="0"/>
+              </a:spcBef>
+              <a:spcAft>
+                <a:spcPts val="0"/>
+              </a:spcAft>
+              <a:buClrTx/>
+              <a:buSzTx/>
+              <a:buFontTx/>
+              <a:buNone/>
+              <a:tabLst/>
+              <a:defRPr/>
+            </a:pPr>
+            <a:r>
+              <a:rPr lang="pt-BR" b="0" i="0" dirty="0" smtClean="0">
+                <a:solidFill>
+                  <a:srgbClr val="374151"/>
+                </a:solidFill>
+                <a:effectLst/>
+                <a:latin typeface="Söhne"/>
+              </a:rPr>
+              <a:t>heurísticas </a:t>
+            </a:r>
+            <a:r>
               <a:rPr lang="pt-BR" b="0" i="0" dirty="0">
                 <a:solidFill>
                   <a:srgbClr val="374151"/>
@@ -904,7 +1002,7 @@
                 <a:effectLst/>
                 <a:latin typeface="Söhne"/>
               </a:rPr>
-              <a:t>heurísticas são estratégias simples ou regras práticas que são usadas para resolver problemas complexos quando métodos mais exatos podem ser impraticáveis.</a:t>
+              <a:t>são estratégias simples ou regras práticas que são usadas para resolver problemas complexos quando métodos mais exatos podem ser impraticáveis.</a:t>
             </a:r>
           </a:p>
           <a:p>
@@ -1235,8 +1333,22 @@
           <a:lstStyle/>
           <a:p>
             <a:r>
-              <a:rPr lang="pt-BR" dirty="0"/>
-              <a:t>Para mais informações</a:t>
+              <a:rPr lang="pt-BR" dirty="0" err="1" smtClean="0"/>
+              <a:t>bernúli</a:t>
+            </a:r>
+            <a:endParaRPr lang="pt-BR" dirty="0" smtClean="0"/>
+          </a:p>
+          <a:p>
+            <a:endParaRPr lang="pt-BR" dirty="0" smtClean="0"/>
+          </a:p>
+          <a:p>
+            <a:r>
+              <a:rPr lang="pt-BR" dirty="0" smtClean="0"/>
+              <a:t>Para </a:t>
+            </a:r>
+            <a:r>
+              <a:rPr lang="pt-BR" dirty="0"/>
+              <a:t>mais informações</a:t>
             </a:r>
             <a:r>
               <a:rPr lang="pt-BR" baseline="0" dirty="0"/>
@@ -3981,7 +4093,7 @@
           <a:p>
             <a:fld id="{221D0464-8C8A-49C0-859F-777E51766A35}" type="datetimeFigureOut">
               <a:rPr lang="pt-BR" smtClean="0"/>
-              <a:t>25/11/2025</a:t>
+              <a:t>30/05/2026</a:t>
             </a:fld>
             <a:endParaRPr lang="pt-BR"/>
           </a:p>
@@ -4023,7 +4135,7 @@
           <a:p>
             <a:fld id="{5CB2E8FC-741C-4BF1-B071-7D772D706EF9}" type="slidenum">
               <a:rPr lang="pt-BR" smtClean="0"/>
-              <a:t>‹#›</a:t>
+              <a:t>‹nº›</a:t>
             </a:fld>
             <a:endParaRPr lang="pt-BR"/>
           </a:p>
@@ -4151,7 +4263,7 @@
           <a:p>
             <a:fld id="{221D0464-8C8A-49C0-859F-777E51766A35}" type="datetimeFigureOut">
               <a:rPr lang="pt-BR" smtClean="0"/>
-              <a:t>25/11/2025</a:t>
+              <a:t>30/05/2026</a:t>
             </a:fld>
             <a:endParaRPr lang="pt-BR"/>
           </a:p>
@@ -4193,7 +4305,7 @@
           <a:p>
             <a:fld id="{5CB2E8FC-741C-4BF1-B071-7D772D706EF9}" type="slidenum">
               <a:rPr lang="pt-BR" smtClean="0"/>
-              <a:t>‹#›</a:t>
+              <a:t>‹nº›</a:t>
             </a:fld>
             <a:endParaRPr lang="pt-BR"/>
           </a:p>
@@ -4331,7 +4443,7 @@
           <a:p>
             <a:fld id="{221D0464-8C8A-49C0-859F-777E51766A35}" type="datetimeFigureOut">
               <a:rPr lang="pt-BR" smtClean="0"/>
-              <a:t>25/11/2025</a:t>
+              <a:t>30/05/2026</a:t>
             </a:fld>
             <a:endParaRPr lang="pt-BR"/>
           </a:p>
@@ -4373,7 +4485,7 @@
           <a:p>
             <a:fld id="{5CB2E8FC-741C-4BF1-B071-7D772D706EF9}" type="slidenum">
               <a:rPr lang="pt-BR" smtClean="0"/>
-              <a:t>‹#›</a:t>
+              <a:t>‹nº›</a:t>
             </a:fld>
             <a:endParaRPr lang="pt-BR"/>
           </a:p>
@@ -4501,7 +4613,7 @@
           <a:p>
             <a:fld id="{221D0464-8C8A-49C0-859F-777E51766A35}" type="datetimeFigureOut">
               <a:rPr lang="pt-BR" smtClean="0"/>
-              <a:t>25/11/2025</a:t>
+              <a:t>30/05/2026</a:t>
             </a:fld>
             <a:endParaRPr lang="pt-BR"/>
           </a:p>
@@ -4543,7 +4655,7 @@
           <a:p>
             <a:fld id="{5CB2E8FC-741C-4BF1-B071-7D772D706EF9}" type="slidenum">
               <a:rPr lang="pt-BR" smtClean="0"/>
-              <a:t>‹#›</a:t>
+              <a:t>‹nº›</a:t>
             </a:fld>
             <a:endParaRPr lang="pt-BR"/>
           </a:p>
@@ -4747,7 +4859,7 @@
           <a:p>
             <a:fld id="{221D0464-8C8A-49C0-859F-777E51766A35}" type="datetimeFigureOut">
               <a:rPr lang="pt-BR" smtClean="0"/>
-              <a:t>25/11/2025</a:t>
+              <a:t>30/05/2026</a:t>
             </a:fld>
             <a:endParaRPr lang="pt-BR"/>
           </a:p>
@@ -4789,7 +4901,7 @@
           <a:p>
             <a:fld id="{5CB2E8FC-741C-4BF1-B071-7D772D706EF9}" type="slidenum">
               <a:rPr lang="pt-BR" smtClean="0"/>
-              <a:t>‹#›</a:t>
+              <a:t>‹nº›</a:t>
             </a:fld>
             <a:endParaRPr lang="pt-BR"/>
           </a:p>
@@ -4979,7 +5091,7 @@
           <a:p>
             <a:fld id="{221D0464-8C8A-49C0-859F-777E51766A35}" type="datetimeFigureOut">
               <a:rPr lang="pt-BR" smtClean="0"/>
-              <a:t>25/11/2025</a:t>
+              <a:t>30/05/2026</a:t>
             </a:fld>
             <a:endParaRPr lang="pt-BR"/>
           </a:p>
@@ -5021,7 +5133,7 @@
           <a:p>
             <a:fld id="{5CB2E8FC-741C-4BF1-B071-7D772D706EF9}" type="slidenum">
               <a:rPr lang="pt-BR" smtClean="0"/>
-              <a:t>‹#›</a:t>
+              <a:t>‹nº›</a:t>
             </a:fld>
             <a:endParaRPr lang="pt-BR"/>
           </a:p>
@@ -5346,7 +5458,7 @@
           <a:p>
             <a:fld id="{221D0464-8C8A-49C0-859F-777E51766A35}" type="datetimeFigureOut">
               <a:rPr lang="pt-BR" smtClean="0"/>
-              <a:t>25/11/2025</a:t>
+              <a:t>30/05/2026</a:t>
             </a:fld>
             <a:endParaRPr lang="pt-BR"/>
           </a:p>
@@ -5388,7 +5500,7 @@
           <a:p>
             <a:fld id="{5CB2E8FC-741C-4BF1-B071-7D772D706EF9}" type="slidenum">
               <a:rPr lang="pt-BR" smtClean="0"/>
-              <a:t>‹#›</a:t>
+              <a:t>‹nº›</a:t>
             </a:fld>
             <a:endParaRPr lang="pt-BR"/>
           </a:p>
@@ -5464,7 +5576,7 @@
           <a:p>
             <a:fld id="{221D0464-8C8A-49C0-859F-777E51766A35}" type="datetimeFigureOut">
               <a:rPr lang="pt-BR" smtClean="0"/>
-              <a:t>25/11/2025</a:t>
+              <a:t>30/05/2026</a:t>
             </a:fld>
             <a:endParaRPr lang="pt-BR"/>
           </a:p>
@@ -5506,7 +5618,7 @@
           <a:p>
             <a:fld id="{5CB2E8FC-741C-4BF1-B071-7D772D706EF9}" type="slidenum">
               <a:rPr lang="pt-BR" smtClean="0"/>
-              <a:t>‹#›</a:t>
+              <a:t>‹nº›</a:t>
             </a:fld>
             <a:endParaRPr lang="pt-BR"/>
           </a:p>
@@ -5559,7 +5671,7 @@
           <a:p>
             <a:fld id="{221D0464-8C8A-49C0-859F-777E51766A35}" type="datetimeFigureOut">
               <a:rPr lang="pt-BR" smtClean="0"/>
-              <a:t>25/11/2025</a:t>
+              <a:t>30/05/2026</a:t>
             </a:fld>
             <a:endParaRPr lang="pt-BR"/>
           </a:p>
@@ -5601,7 +5713,7 @@
           <a:p>
             <a:fld id="{5CB2E8FC-741C-4BF1-B071-7D772D706EF9}" type="slidenum">
               <a:rPr lang="pt-BR" smtClean="0"/>
-              <a:t>‹#›</a:t>
+              <a:t>‹nº›</a:t>
             </a:fld>
             <a:endParaRPr lang="pt-BR"/>
           </a:p>
@@ -5836,7 +5948,7 @@
           <a:p>
             <a:fld id="{221D0464-8C8A-49C0-859F-777E51766A35}" type="datetimeFigureOut">
               <a:rPr lang="pt-BR" smtClean="0"/>
-              <a:t>25/11/2025</a:t>
+              <a:t>30/05/2026</a:t>
             </a:fld>
             <a:endParaRPr lang="pt-BR"/>
           </a:p>
@@ -5878,7 +5990,7 @@
           <a:p>
             <a:fld id="{5CB2E8FC-741C-4BF1-B071-7D772D706EF9}" type="slidenum">
               <a:rPr lang="pt-BR" smtClean="0"/>
-              <a:t>‹#›</a:t>
+              <a:t>‹nº›</a:t>
             </a:fld>
             <a:endParaRPr lang="pt-BR"/>
           </a:p>
@@ -6089,7 +6201,7 @@
           <a:p>
             <a:fld id="{221D0464-8C8A-49C0-859F-777E51766A35}" type="datetimeFigureOut">
               <a:rPr lang="pt-BR" smtClean="0"/>
-              <a:t>25/11/2025</a:t>
+              <a:t>30/05/2026</a:t>
             </a:fld>
             <a:endParaRPr lang="pt-BR"/>
           </a:p>
@@ -6131,7 +6243,7 @@
           <a:p>
             <a:fld id="{5CB2E8FC-741C-4BF1-B071-7D772D706EF9}" type="slidenum">
               <a:rPr lang="pt-BR" smtClean="0"/>
-              <a:t>‹#›</a:t>
+              <a:t>‹nº›</a:t>
             </a:fld>
             <a:endParaRPr lang="pt-BR"/>
           </a:p>
@@ -6302,7 +6414,7 @@
           <a:p>
             <a:fld id="{221D0464-8C8A-49C0-859F-777E51766A35}" type="datetimeFigureOut">
               <a:rPr lang="pt-BR" smtClean="0"/>
-              <a:t>25/11/2025</a:t>
+              <a:t>30/05/2026</a:t>
             </a:fld>
             <a:endParaRPr lang="pt-BR"/>
           </a:p>
@@ -6380,7 +6492,7 @@
           <a:p>
             <a:fld id="{5CB2E8FC-741C-4BF1-B071-7D772D706EF9}" type="slidenum">
               <a:rPr lang="pt-BR" smtClean="0"/>
-              <a:t>‹#›</a:t>
+              <a:t>‹nº›</a:t>
             </a:fld>
             <a:endParaRPr lang="pt-BR"/>
           </a:p>
@@ -6712,7 +6824,7 @@
           <p:cNvPr id="2" name="Título 1">
             <a:extLst>
               <a:ext uri="{FF2B5EF4-FFF2-40B4-BE49-F238E27FC236}">
-                <a16:creationId xmlns:a16="http://schemas.microsoft.com/office/drawing/2014/main" id="{32666AC8-2E17-4DB4-B0F5-60C640CCFD2E}"/>
+                <a16:creationId xmlns:a16="http://schemas.microsoft.com/office/drawing/2014/main" xmlns="" id="{32666AC8-2E17-4DB4-B0F5-60C640CCFD2E}"/>
               </a:ext>
             </a:extLst>
           </p:cNvPr>
@@ -6739,6 +6851,10 @@
               <a:rPr lang="pt-BR" sz="5400" dirty="0"/>
               <a:t>T320 - Introdução ao Aprendizado de Máquina II:</a:t>
             </a:r>
+            <a:r>
+              <a:rPr lang="pt-BR" dirty="0"/>
+              <a:t/>
+            </a:r>
             <a:br>
               <a:rPr lang="pt-BR" dirty="0"/>
             </a:br>
@@ -6759,7 +6875,7 @@
           <p:cNvPr id="4" name="CaixaDeTexto 3">
             <a:extLst>
               <a:ext uri="{FF2B5EF4-FFF2-40B4-BE49-F238E27FC236}">
-                <a16:creationId xmlns:a16="http://schemas.microsoft.com/office/drawing/2014/main" id="{430EB894-B7D4-434C-9D1A-A14094D9BEEC}"/>
+                <a16:creationId xmlns:a16="http://schemas.microsoft.com/office/drawing/2014/main" xmlns="" id="{430EB894-B7D4-434C-9D1A-A14094D9BEEC}"/>
               </a:ext>
             </a:extLst>
           </p:cNvPr>
@@ -6800,7 +6916,7 @@
           <p:cNvPr id="1026" name="Picture 2" descr="Logo">
             <a:extLst>
               <a:ext uri="{FF2B5EF4-FFF2-40B4-BE49-F238E27FC236}">
-                <a16:creationId xmlns:a16="http://schemas.microsoft.com/office/drawing/2014/main" id="{3F2642E0-4F6A-4196-8F58-E77D36E9A33F}"/>
+                <a16:creationId xmlns:a16="http://schemas.microsoft.com/office/drawing/2014/main" xmlns="" id="{3F2642E0-4F6A-4196-8F58-E77D36E9A33F}"/>
               </a:ext>
             </a:extLst>
           </p:cNvPr>
@@ -6845,7 +6961,7 @@
           <p:cNvPr id="5122" name="Picture 2" descr="Image result for machine learning">
             <a:extLst>
               <a:ext uri="{FF2B5EF4-FFF2-40B4-BE49-F238E27FC236}">
-                <a16:creationId xmlns:a16="http://schemas.microsoft.com/office/drawing/2014/main" id="{810CE0A2-4102-44A6-A370-175E7896CDCB}"/>
+                <a16:creationId xmlns:a16="http://schemas.microsoft.com/office/drawing/2014/main" xmlns="" id="{810CE0A2-4102-44A6-A370-175E7896CDCB}"/>
               </a:ext>
             </a:extLst>
           </p:cNvPr>
@@ -6920,7 +7036,7 @@
           <p:cNvPr id="2" name="Título 1">
             <a:extLst>
               <a:ext uri="{FF2B5EF4-FFF2-40B4-BE49-F238E27FC236}">
-                <a16:creationId xmlns:a16="http://schemas.microsoft.com/office/drawing/2014/main" id="{4C255533-E569-D156-E00B-04EA94A90203}"/>
+                <a16:creationId xmlns:a16="http://schemas.microsoft.com/office/drawing/2014/main" xmlns="" id="{4C255533-E569-D156-E00B-04EA94A90203}"/>
               </a:ext>
             </a:extLst>
           </p:cNvPr>
@@ -6950,7 +7066,7 @@
               <p:cNvPr id="5" name="Espaço Reservado para Conteúdo 4">
                 <a:extLst>
                   <a:ext uri="{FF2B5EF4-FFF2-40B4-BE49-F238E27FC236}">
-                    <a16:creationId xmlns:a16="http://schemas.microsoft.com/office/drawing/2014/main" id="{9F8D780D-C739-EE50-7309-37EB11B27ACE}"/>
+                    <a16:creationId xmlns:a16="http://schemas.microsoft.com/office/drawing/2014/main" xmlns="" id="{9F8D780D-C739-EE50-7309-37EB11B27ACE}"/>
                   </a:ext>
                 </a:extLst>
               </p:cNvPr>
@@ -7628,7 +7744,7 @@
           <p:cNvPr id="3" name="Picture 3">
             <a:extLst>
               <a:ext uri="{FF2B5EF4-FFF2-40B4-BE49-F238E27FC236}">
-                <a16:creationId xmlns:a16="http://schemas.microsoft.com/office/drawing/2014/main" id="{EFE574B9-9C76-EB21-4B01-2DB90146BAB0}"/>
+                <a16:creationId xmlns:a16="http://schemas.microsoft.com/office/drawing/2014/main" xmlns="" id="{EFE574B9-9C76-EB21-4B01-2DB90146BAB0}"/>
               </a:ext>
             </a:extLst>
           </p:cNvPr>
@@ -7693,7 +7809,7 @@
           <p:cNvPr id="2" name="Título 1">
             <a:extLst>
               <a:ext uri="{FF2B5EF4-FFF2-40B4-BE49-F238E27FC236}">
-                <a16:creationId xmlns:a16="http://schemas.microsoft.com/office/drawing/2014/main" id="{4C255533-E569-D156-E00B-04EA94A90203}"/>
+                <a16:creationId xmlns:a16="http://schemas.microsoft.com/office/drawing/2014/main" xmlns="" id="{4C255533-E569-D156-E00B-04EA94A90203}"/>
               </a:ext>
             </a:extLst>
           </p:cNvPr>
@@ -7723,7 +7839,7 @@
               <p:cNvPr id="5" name="Espaço Reservado para Conteúdo 4">
                 <a:extLst>
                   <a:ext uri="{FF2B5EF4-FFF2-40B4-BE49-F238E27FC236}">
-                    <a16:creationId xmlns:a16="http://schemas.microsoft.com/office/drawing/2014/main" id="{9F8D780D-C739-EE50-7309-37EB11B27ACE}"/>
+                    <a16:creationId xmlns:a16="http://schemas.microsoft.com/office/drawing/2014/main" xmlns="" id="{9F8D780D-C739-EE50-7309-37EB11B27ACE}"/>
                   </a:ext>
                 </a:extLst>
               </p:cNvPr>
@@ -7951,7 +8067,7 @@
           <p:cNvPr id="3" name="Picture 3">
             <a:extLst>
               <a:ext uri="{FF2B5EF4-FFF2-40B4-BE49-F238E27FC236}">
-                <a16:creationId xmlns:a16="http://schemas.microsoft.com/office/drawing/2014/main" id="{EFE574B9-9C76-EB21-4B01-2DB90146BAB0}"/>
+                <a16:creationId xmlns:a16="http://schemas.microsoft.com/office/drawing/2014/main" xmlns="" id="{EFE574B9-9C76-EB21-4B01-2DB90146BAB0}"/>
               </a:ext>
             </a:extLst>
           </p:cNvPr>
@@ -8016,7 +8132,7 @@
           <p:cNvPr id="2" name="Título 1">
             <a:extLst>
               <a:ext uri="{FF2B5EF4-FFF2-40B4-BE49-F238E27FC236}">
-                <a16:creationId xmlns:a16="http://schemas.microsoft.com/office/drawing/2014/main" id="{6143E453-3B70-BBF0-0C1A-4F63A3DD8B24}"/>
+                <a16:creationId xmlns:a16="http://schemas.microsoft.com/office/drawing/2014/main" xmlns="" id="{6143E453-3B70-BBF0-0C1A-4F63A3DD8B24}"/>
               </a:ext>
             </a:extLst>
           </p:cNvPr>
@@ -8046,7 +8162,7 @@
               <p:cNvPr id="3" name="Espaço Reservado para Conteúdo 2">
                 <a:extLst>
                   <a:ext uri="{FF2B5EF4-FFF2-40B4-BE49-F238E27FC236}">
-                    <a16:creationId xmlns:a16="http://schemas.microsoft.com/office/drawing/2014/main" id="{447E95C3-AC41-0888-3CA7-1EAB28F9A47C}"/>
+                    <a16:creationId xmlns:a16="http://schemas.microsoft.com/office/drawing/2014/main" xmlns="" id="{447E95C3-AC41-0888-3CA7-1EAB28F9A47C}"/>
                   </a:ext>
                 </a:extLst>
               </p:cNvPr>
@@ -8397,7 +8513,7 @@
           <p:cNvPr id="2" name="Título 1">
             <a:extLst>
               <a:ext uri="{FF2B5EF4-FFF2-40B4-BE49-F238E27FC236}">
-                <a16:creationId xmlns:a16="http://schemas.microsoft.com/office/drawing/2014/main" id="{8FE2DAD2-5657-42A1-35B9-4BB9FD00F794}"/>
+                <a16:creationId xmlns:a16="http://schemas.microsoft.com/office/drawing/2014/main" xmlns="" id="{8FE2DAD2-5657-42A1-35B9-4BB9FD00F794}"/>
               </a:ext>
             </a:extLst>
           </p:cNvPr>
@@ -8432,7 +8548,7 @@
               <p:cNvPr id="3" name="Espaço Reservado para Conteúdo 2">
                 <a:extLst>
                   <a:ext uri="{FF2B5EF4-FFF2-40B4-BE49-F238E27FC236}">
-                    <a16:creationId xmlns:a16="http://schemas.microsoft.com/office/drawing/2014/main" id="{90C1EAA3-4293-62D4-5778-91C90AA88537}"/>
+                    <a16:creationId xmlns:a16="http://schemas.microsoft.com/office/drawing/2014/main" xmlns="" id="{90C1EAA3-4293-62D4-5778-91C90AA88537}"/>
                   </a:ext>
                 </a:extLst>
               </p:cNvPr>
@@ -8717,7 +8833,7 @@
           <p:cNvPr id="2" name="Título 1">
             <a:extLst>
               <a:ext uri="{FF2B5EF4-FFF2-40B4-BE49-F238E27FC236}">
-                <a16:creationId xmlns:a16="http://schemas.microsoft.com/office/drawing/2014/main" id="{EE428791-3DA4-5B74-468E-92866ACF314A}"/>
+                <a16:creationId xmlns:a16="http://schemas.microsoft.com/office/drawing/2014/main" xmlns="" id="{EE428791-3DA4-5B74-468E-92866ACF314A}"/>
               </a:ext>
             </a:extLst>
           </p:cNvPr>
@@ -8745,7 +8861,7 @@
           <p:cNvPr id="3" name="Espaço Reservado para Conteúdo 2">
             <a:extLst>
               <a:ext uri="{FF2B5EF4-FFF2-40B4-BE49-F238E27FC236}">
-                <a16:creationId xmlns:a16="http://schemas.microsoft.com/office/drawing/2014/main" id="{75BB692B-7CD6-BD6B-43F7-47D0588E1583}"/>
+                <a16:creationId xmlns:a16="http://schemas.microsoft.com/office/drawing/2014/main" xmlns="" id="{75BB692B-7CD6-BD6B-43F7-47D0588E1583}"/>
               </a:ext>
             </a:extLst>
           </p:cNvPr>
@@ -8840,8 +8956,21 @@
             </a:r>
             <a:r>
               <a:rPr lang="pt-BR" dirty="0"/>
-              <a:t>pode afetar a velocidade de convergência do algoritmo.</a:t>
-            </a:r>
+              <a:t>pode afetar a velocidade de </a:t>
+            </a:r>
+            <a:r>
+              <a:rPr lang="pt-BR" dirty="0" smtClean="0"/>
+              <a:t>convergência e a estabilidade </a:t>
+            </a:r>
+            <a:r>
+              <a:rPr lang="pt-BR" dirty="0"/>
+              <a:t>do </a:t>
+            </a:r>
+            <a:r>
+              <a:rPr lang="pt-BR" dirty="0" smtClean="0"/>
+              <a:t>algoritmo.</a:t>
+            </a:r>
+            <a:endParaRPr lang="pt-BR" dirty="0"/>
           </a:p>
           <a:p>
             <a:r>
@@ -8918,7 +9047,7 @@
           <p:cNvPr id="2" name="Título 1">
             <a:extLst>
               <a:ext uri="{FF2B5EF4-FFF2-40B4-BE49-F238E27FC236}">
-                <a16:creationId xmlns:a16="http://schemas.microsoft.com/office/drawing/2014/main" id="{8E5B52B4-554F-EA14-6F5D-C6A1B0CAEE41}"/>
+                <a16:creationId xmlns:a16="http://schemas.microsoft.com/office/drawing/2014/main" xmlns="" id="{8E5B52B4-554F-EA14-6F5D-C6A1B0CAEE41}"/>
               </a:ext>
             </a:extLst>
           </p:cNvPr>
@@ -8946,7 +9075,7 @@
           <p:cNvPr id="3" name="Espaço Reservado para Conteúdo 2">
             <a:extLst>
               <a:ext uri="{FF2B5EF4-FFF2-40B4-BE49-F238E27FC236}">
-                <a16:creationId xmlns:a16="http://schemas.microsoft.com/office/drawing/2014/main" id="{460D4529-22E6-EDA7-A512-7D4EBDA021F4}"/>
+                <a16:creationId xmlns:a16="http://schemas.microsoft.com/office/drawing/2014/main" xmlns="" id="{460D4529-22E6-EDA7-A512-7D4EBDA021F4}"/>
               </a:ext>
             </a:extLst>
           </p:cNvPr>
@@ -8960,7 +9089,7 @@
         <p:spPr>
           <a:xfrm>
             <a:off x="838200" y="1825624"/>
-            <a:ext cx="11175460" cy="5032375"/>
+            <a:ext cx="11353800" cy="5032375"/>
           </a:xfrm>
         </p:spPr>
         <p:txBody>
@@ -9067,8 +9196,53 @@
             </a:r>
             <a:r>
               <a:rPr lang="pt-BR" dirty="0"/>
-              <a:t>, devem ter pesos iniciais diferentes, caso contrário, eles terão os mesmos pesos ao longo do treinamento (i.e., aprendem a mesma coisa). </a:t>
-            </a:r>
+              <a:t>, devem ter pesos iniciais diferentes, caso contrário, eles terão </a:t>
+            </a:r>
+            <a:r>
+              <a:rPr lang="pt-BR" dirty="0" smtClean="0"/>
+              <a:t>as mesmas atualizações e os</a:t>
+            </a:r>
+            <a:r>
+              <a:rPr lang="pt-BR" dirty="0" smtClean="0"/>
+              <a:t> </a:t>
+            </a:r>
+            <a:r>
+              <a:rPr lang="pt-BR" dirty="0"/>
+              <a:t>mesmos pesos ao longo do treinamento </a:t>
+            </a:r>
+            <a:r>
+              <a:rPr lang="pt-BR" dirty="0" smtClean="0"/>
+              <a:t>e, consequentemente, </a:t>
+            </a:r>
+            <a:r>
+              <a:rPr lang="pt-BR" b="1" i="1" dirty="0" smtClean="0">
+                <a:solidFill>
+                  <a:schemeClr val="accent2"/>
+                </a:solidFill>
+              </a:rPr>
+              <a:t>aprenderão a </a:t>
+            </a:r>
+            <a:r>
+              <a:rPr lang="pt-BR" b="1" i="1" dirty="0">
+                <a:solidFill>
+                  <a:schemeClr val="accent2"/>
+                </a:solidFill>
+              </a:rPr>
+              <a:t>mesma </a:t>
+            </a:r>
+            <a:r>
+              <a:rPr lang="pt-BR" b="1" i="1" dirty="0" smtClean="0">
+                <a:solidFill>
+                  <a:schemeClr val="accent2"/>
+                </a:solidFill>
+              </a:rPr>
+              <a:t>coisa</a:t>
+            </a:r>
+            <a:r>
+              <a:rPr lang="pt-BR" dirty="0" smtClean="0"/>
+              <a:t>. </a:t>
+            </a:r>
+            <a:endParaRPr lang="pt-BR" dirty="0"/>
           </a:p>
           <a:p>
             <a:r>
@@ -9085,7 +9259,11 @@
             </a:r>
             <a:r>
               <a:rPr lang="pt-BR" dirty="0"/>
-              <a:t>, utilizamos algumas </a:t>
+              <a:t>, </a:t>
+            </a:r>
+            <a:r>
+              <a:rPr lang="pt-BR" dirty="0" smtClean="0"/>
+              <a:t>devemos usar algumas </a:t>
             </a:r>
             <a:r>
               <a:rPr lang="pt-BR" b="1" i="1" dirty="0">
@@ -9145,7 +9323,7 @@
           <p:cNvPr id="2" name="Título 1">
             <a:extLst>
               <a:ext uri="{FF2B5EF4-FFF2-40B4-BE49-F238E27FC236}">
-                <a16:creationId xmlns:a16="http://schemas.microsoft.com/office/drawing/2014/main" id="{A42A1312-8FBD-F4EC-A0B1-BCBB5B1CE6CB}"/>
+                <a16:creationId xmlns:a16="http://schemas.microsoft.com/office/drawing/2014/main" xmlns="" id="{A42A1312-8FBD-F4EC-A0B1-BCBB5B1CE6CB}"/>
               </a:ext>
             </a:extLst>
           </p:cNvPr>
@@ -9173,7 +9351,7 @@
           <p:cNvPr id="3" name="Espaço Reservado para Conteúdo 2">
             <a:extLst>
               <a:ext uri="{FF2B5EF4-FFF2-40B4-BE49-F238E27FC236}">
-                <a16:creationId xmlns:a16="http://schemas.microsoft.com/office/drawing/2014/main" id="{EB81EEEB-3D53-992A-94F1-E7CCB97CE926}"/>
+                <a16:creationId xmlns:a16="http://schemas.microsoft.com/office/drawing/2014/main" xmlns="" id="{EB81EEEB-3D53-992A-94F1-E7CCB97CE926}"/>
               </a:ext>
             </a:extLst>
           </p:cNvPr>
@@ -9346,7 +9524,7 @@
           <p:cNvPr id="2" name="Título 1">
             <a:extLst>
               <a:ext uri="{FF2B5EF4-FFF2-40B4-BE49-F238E27FC236}">
-                <a16:creationId xmlns:a16="http://schemas.microsoft.com/office/drawing/2014/main" id="{A376E3AB-5174-DE2C-39F4-65701DAC3E86}"/>
+                <a16:creationId xmlns:a16="http://schemas.microsoft.com/office/drawing/2014/main" xmlns="" id="{A376E3AB-5174-DE2C-39F4-65701DAC3E86}"/>
               </a:ext>
             </a:extLst>
           </p:cNvPr>
@@ -9374,7 +9552,7 @@
           <p:cNvPr id="3" name="Espaço Reservado para Conteúdo 2">
             <a:extLst>
               <a:ext uri="{FF2B5EF4-FFF2-40B4-BE49-F238E27FC236}">
-                <a16:creationId xmlns:a16="http://schemas.microsoft.com/office/drawing/2014/main" id="{BB154AAA-E17D-7EF0-2985-A3CB24744A72}"/>
+                <a16:creationId xmlns:a16="http://schemas.microsoft.com/office/drawing/2014/main" xmlns="" id="{BB154AAA-E17D-7EF0-2985-A3CB24744A72}"/>
               </a:ext>
             </a:extLst>
           </p:cNvPr>
@@ -9518,12 +9696,12 @@
               <a:t> e também podem apresentar </a:t>
             </a:r>
             <a:r>
-              <a:rPr lang="pt-BR" b="1" i="1" dirty="0">
+              <a:rPr lang="pt-BR" b="1" i="1" dirty="0" smtClean="0">
                 <a:solidFill>
                   <a:srgbClr val="7030A0"/>
                 </a:solidFill>
               </a:rPr>
-              <a:t>instabilidade ou lentidão </a:t>
+              <a:t>lentidão </a:t>
             </a:r>
             <a:r>
               <a:rPr lang="pt-BR" dirty="0"/>
@@ -9580,14 +9758,14 @@
             <a:r>
               <a:rPr lang="pt-BR" b="1" i="1" dirty="0">
                 <a:solidFill>
-                  <a:srgbClr val="0070C0"/>
+                  <a:srgbClr val="00B0F0"/>
                 </a:solidFill>
               </a:rPr>
-              <a:t>heurísticas</a:t>
-            </a:r>
-            <a:r>
-              <a:rPr lang="pt-BR" dirty="0"/>
-              <a:t> para inicialização dos pesos.</a:t>
+              <a:t>heurísticas para inicialização dos pesos</a:t>
+            </a:r>
+            <a:r>
+              <a:rPr lang="pt-BR" dirty="0"/>
+              <a:t>.</a:t>
             </a:r>
           </a:p>
           <a:p>
@@ -9596,49 +9774,6 @@
               <a:buChar char="§"/>
             </a:pPr>
             <a:endParaRPr lang="pt-BR" dirty="0"/>
-          </a:p>
-        </p:txBody>
-      </p:sp>
-      <p:sp>
-        <p:nvSpPr>
-          <p:cNvPr id="4" name="Rectangle 3">
-            <a:extLst>
-              <a:ext uri="{FF2B5EF4-FFF2-40B4-BE49-F238E27FC236}">
-                <a16:creationId xmlns:a16="http://schemas.microsoft.com/office/drawing/2014/main" id="{5731E30D-84C7-2A28-0973-3A88731D0A33}"/>
-              </a:ext>
-            </a:extLst>
-          </p:cNvPr>
-          <p:cNvSpPr/>
-          <p:nvPr/>
-        </p:nvSpPr>
-        <p:spPr>
-          <a:xfrm>
-            <a:off x="9281780" y="6581001"/>
-            <a:ext cx="2910220" cy="276999"/>
-          </a:xfrm>
-          <a:prstGeom prst="rect">
-            <a:avLst/>
-          </a:prstGeom>
-        </p:spPr>
-        <p:txBody>
-          <a:bodyPr wrap="none">
-            <a:spAutoFit/>
-          </a:bodyPr>
-          <a:lstStyle/>
-          <a:p>
-            <a:r>
-              <a:rPr lang="pt-BR" sz="1200" dirty="0">
-                <a:hlinkClick r:id="rId3"/>
-              </a:rPr>
-              <a:t>[1] </a:t>
-            </a:r>
-            <a:r>
-              <a:rPr lang="en-US" sz="1200" dirty="0">
-                <a:hlinkClick r:id="rId3"/>
-              </a:rPr>
-              <a:t>The importance of effective initialization</a:t>
-            </a:r>
-            <a:endParaRPr lang="pt-BR" sz="1200" dirty="0"/>
           </a:p>
         </p:txBody>
       </p:sp>
@@ -9677,7 +9812,7 @@
           <p:cNvPr id="2" name="Título 1">
             <a:extLst>
               <a:ext uri="{FF2B5EF4-FFF2-40B4-BE49-F238E27FC236}">
-                <a16:creationId xmlns:a16="http://schemas.microsoft.com/office/drawing/2014/main" id="{586FD8F7-2118-E1F9-E400-402C61B9B2DA}"/>
+                <a16:creationId xmlns:a16="http://schemas.microsoft.com/office/drawing/2014/main" xmlns="" id="{586FD8F7-2118-E1F9-E400-402C61B9B2DA}"/>
               </a:ext>
             </a:extLst>
           </p:cNvPr>
@@ -9700,14 +9835,14 @@
           </a:p>
         </p:txBody>
       </p:sp>
-      <mc:AlternateContent xmlns:mc="http://schemas.openxmlformats.org/markup-compatibility/2006" xmlns:a14="http://schemas.microsoft.com/office/drawing/2010/main">
-        <mc:Choice Requires="a14">
+      <mc:AlternateContent xmlns:mc="http://schemas.openxmlformats.org/markup-compatibility/2006">
+        <mc:Choice xmlns:a14="http://schemas.microsoft.com/office/drawing/2010/main" Requires="a14">
           <p:sp>
             <p:nvSpPr>
               <p:cNvPr id="3" name="Espaço Reservado para Conteúdo 2">
                 <a:extLst>
                   <a:ext uri="{FF2B5EF4-FFF2-40B4-BE49-F238E27FC236}">
-                    <a16:creationId xmlns:a16="http://schemas.microsoft.com/office/drawing/2014/main" id="{9A595344-CA31-A0FF-C172-CCD7759FE578}"/>
+                    <a16:creationId xmlns:a16="http://schemas.microsoft.com/office/drawing/2014/main" xmlns="" id="{9A595344-CA31-A0FF-C172-CCD7759FE578}"/>
                   </a:ext>
                 </a:extLst>
               </p:cNvPr>
@@ -9732,7 +9867,11 @@
               <a:p>
                 <a:r>
                   <a:rPr lang="pt-BR" dirty="0"/>
-                  <a:t>A ideia por trás destas heurísticas de inicialização dos pesos é </a:t>
+                  <a:t>A ideia por trás destas heurísticas </a:t>
+                </a:r>
+                <a:r>
+                  <a:rPr lang="pt-BR" dirty="0" smtClean="0"/>
+                  <a:t>é </a:t>
                 </a:r>
                 <a:r>
                   <a:rPr lang="pt-BR" b="1" i="1" dirty="0">
@@ -9740,11 +9879,67 @@
                       <a:srgbClr val="00B050"/>
                     </a:solidFill>
                   </a:rPr>
-                  <a:t>manter a média das ativações dos nós igual a zero e suas variâncias constantes ao longo das várias camadas da rede</a:t>
+                  <a:t>manter a média das </a:t>
+                </a:r>
+                <a:r>
+                  <a:rPr lang="pt-BR" b="1" i="1" dirty="0" smtClean="0">
+                    <a:solidFill>
+                      <a:srgbClr val="00B050"/>
+                    </a:solidFill>
+                  </a:rPr>
+                  <a:t>ativações igual </a:t>
+                </a:r>
+                <a:r>
+                  <a:rPr lang="pt-BR" b="1" i="1" dirty="0">
+                    <a:solidFill>
+                      <a:srgbClr val="00B050"/>
+                    </a:solidFill>
+                  </a:rPr>
+                  <a:t>a zero </a:t>
+                </a:r>
+                <a:r>
+                  <a:rPr lang="pt-BR" dirty="0" smtClean="0"/>
+                  <a:t>e </a:t>
+                </a:r>
+                <a:r>
+                  <a:rPr lang="pt-BR" b="1" dirty="0" smtClean="0">
+                    <a:solidFill>
+                      <a:schemeClr val="accent2"/>
+                    </a:solidFill>
+                  </a:rPr>
+                  <a:t>preservar </a:t>
+                </a:r>
+                <a:r>
+                  <a:rPr lang="pt-BR" b="1" dirty="0">
+                    <a:solidFill>
+                      <a:schemeClr val="accent2"/>
+                    </a:solidFill>
+                  </a:rPr>
+                  <a:t>aproximadamente a variância das ativações e dos gradientes</a:t>
                 </a:r>
                 <a:r>
                   <a:rPr lang="pt-BR" dirty="0"/>
-                  <a:t>, pois desta forma evita-se o desaparecimento ou a explosão do gradiente.</a:t>
+                  <a:t> ao longo da propagação direta e </a:t>
+                </a:r>
+                <a:r>
+                  <a:rPr lang="pt-BR" dirty="0" err="1"/>
+                  <a:t>retropropagação</a:t>
+                </a:r>
+                <a:r>
+                  <a:rPr lang="pt-BR" dirty="0"/>
+                  <a:t>, </a:t>
+                </a:r>
+                <a:r>
+                  <a:rPr lang="pt-BR" dirty="0" smtClean="0"/>
+                  <a:t>mitigando</a:t>
+                </a:r>
+                <a:r>
+                  <a:rPr lang="pt-BR" dirty="0" smtClean="0"/>
+                  <a:t>-se </a:t>
+                </a:r>
+                <a:r>
+                  <a:rPr lang="pt-BR" dirty="0"/>
+                  <a:t>o desaparecimento ou a explosão do gradiente.</a:t>
                 </a:r>
               </a:p>
               <a:p>
@@ -9812,13 +10007,13 @@
             </p:txBody>
           </p:sp>
         </mc:Choice>
-        <mc:Fallback xmlns="">
+        <mc:Fallback>
           <p:sp>
             <p:nvSpPr>
               <p:cNvPr id="3" name="Espaço Reservado para Conteúdo 2">
                 <a:extLst>
                   <a:ext uri="{FF2B5EF4-FFF2-40B4-BE49-F238E27FC236}">
-                    <a16:creationId xmlns:a16="http://schemas.microsoft.com/office/drawing/2014/main" id="{9A595344-CA31-A0FF-C172-CCD7759FE578}"/>
+                    <a16:creationId xmlns:a16="http://schemas.microsoft.com/office/drawing/2014/main" xmlns:a14="http://schemas.microsoft.com/office/drawing/2010/main" xmlns="" id="{9A595344-CA31-A0FF-C172-CCD7759FE578}"/>
                   </a:ext>
                 </a:extLst>
               </p:cNvPr>
@@ -9834,10 +10029,10 @@
                 <a:off x="838200" y="1825624"/>
                 <a:ext cx="11214370" cy="2444819"/>
               </a:xfrm>
-              <a:blipFill>
+              <a:blipFill rotWithShape="0">
                 <a:blip r:embed="rId3"/>
                 <a:stretch>
-                  <a:fillRect l="-979" t="-5473" r="-1740"/>
+                  <a:fillRect l="-979" t="-5473" r="-1794"/>
                 </a:stretch>
               </a:blipFill>
             </p:spPr>
@@ -9863,7 +10058,7 @@
               <p:cNvPr id="4" name="Table 3">
                 <a:extLst>
                   <a:ext uri="{FF2B5EF4-FFF2-40B4-BE49-F238E27FC236}">
-                    <a16:creationId xmlns:a16="http://schemas.microsoft.com/office/drawing/2014/main" id="{E2B30CC6-FD89-06DA-0809-BF2604EB8694}"/>
+                    <a16:creationId xmlns:a16="http://schemas.microsoft.com/office/drawing/2014/main" xmlns="" id="{E2B30CC6-FD89-06DA-0809-BF2604EB8694}"/>
                   </a:ext>
                 </a:extLst>
               </p:cNvPr>
@@ -9892,28 +10087,28 @@
                     <a:gridCol w="1854751">
                       <a:extLst>
                         <a:ext uri="{9D8B030D-6E8A-4147-A177-3AD203B41FA5}">
-                          <a16:colId xmlns:a16="http://schemas.microsoft.com/office/drawing/2014/main" val="20000"/>
+                          <a16:colId xmlns:a16="http://schemas.microsoft.com/office/drawing/2014/main" xmlns="" val="20000"/>
                         </a:ext>
                       </a:extLst>
                     </a:gridCol>
                     <a:gridCol w="3663486">
                       <a:extLst>
                         <a:ext uri="{9D8B030D-6E8A-4147-A177-3AD203B41FA5}">
-                          <a16:colId xmlns:a16="http://schemas.microsoft.com/office/drawing/2014/main" val="20001"/>
+                          <a16:colId xmlns:a16="http://schemas.microsoft.com/office/drawing/2014/main" xmlns="" val="20001"/>
                         </a:ext>
                       </a:extLst>
                     </a:gridCol>
                     <a:gridCol w="3080660">
                       <a:extLst>
                         <a:ext uri="{9D8B030D-6E8A-4147-A177-3AD203B41FA5}">
-                          <a16:colId xmlns:a16="http://schemas.microsoft.com/office/drawing/2014/main" val="20002"/>
+                          <a16:colId xmlns:a16="http://schemas.microsoft.com/office/drawing/2014/main" xmlns="" val="20002"/>
                         </a:ext>
                       </a:extLst>
                     </a:gridCol>
                     <a:gridCol w="2437577">
                       <a:extLst>
                         <a:ext uri="{9D8B030D-6E8A-4147-A177-3AD203B41FA5}">
-                          <a16:colId xmlns:a16="http://schemas.microsoft.com/office/drawing/2014/main" val="20003"/>
+                          <a16:colId xmlns:a16="http://schemas.microsoft.com/office/drawing/2014/main" xmlns="" val="20003"/>
                         </a:ext>
                       </a:extLst>
                     </a:gridCol>
@@ -10234,7 +10429,7 @@
                     </a:tc>
                     <a:extLst>
                       <a:ext uri="{0D108BD9-81ED-4DB2-BD59-A6C34878D82A}">
-                        <a16:rowId xmlns:a16="http://schemas.microsoft.com/office/drawing/2014/main" val="10000"/>
+                        <a16:rowId xmlns:a16="http://schemas.microsoft.com/office/drawing/2014/main" xmlns="" val="10000"/>
                       </a:ext>
                     </a:extLst>
                   </a:tr>
@@ -10596,7 +10791,7 @@
                     </a:tc>
                     <a:extLst>
                       <a:ext uri="{0D108BD9-81ED-4DB2-BD59-A6C34878D82A}">
-                        <a16:rowId xmlns:a16="http://schemas.microsoft.com/office/drawing/2014/main" val="10001"/>
+                        <a16:rowId xmlns:a16="http://schemas.microsoft.com/office/drawing/2014/main" xmlns="" val="10001"/>
                       </a:ext>
                     </a:extLst>
                   </a:tr>
@@ -10947,7 +11142,7 @@
                     </a:tc>
                     <a:extLst>
                       <a:ext uri="{0D108BD9-81ED-4DB2-BD59-A6C34878D82A}">
-                        <a16:rowId xmlns:a16="http://schemas.microsoft.com/office/drawing/2014/main" val="10002"/>
+                        <a16:rowId xmlns:a16="http://schemas.microsoft.com/office/drawing/2014/main" xmlns="" val="10002"/>
                       </a:ext>
                     </a:extLst>
                   </a:tr>
@@ -11293,7 +11488,7 @@
                     </a:tc>
                     <a:extLst>
                       <a:ext uri="{0D108BD9-81ED-4DB2-BD59-A6C34878D82A}">
-                        <a16:rowId xmlns:a16="http://schemas.microsoft.com/office/drawing/2014/main" val="10003"/>
+                        <a16:rowId xmlns:a16="http://schemas.microsoft.com/office/drawing/2014/main" xmlns="" val="10003"/>
                       </a:ext>
                     </a:extLst>
                   </a:tr>
@@ -12247,7 +12442,7 @@
           <p:cNvPr id="6" name="CaixaDeTexto 5">
             <a:extLst>
               <a:ext uri="{FF2B5EF4-FFF2-40B4-BE49-F238E27FC236}">
-                <a16:creationId xmlns:a16="http://schemas.microsoft.com/office/drawing/2014/main" id="{E5557117-42B8-ED06-8392-EAE399DA24A0}"/>
+                <a16:creationId xmlns:a16="http://schemas.microsoft.com/office/drawing/2014/main" xmlns="" id="{E5557117-42B8-ED06-8392-EAE399DA24A0}"/>
               </a:ext>
             </a:extLst>
           </p:cNvPr>
@@ -12290,49 +12485,6 @@
               <a:rPr lang="pt-BR" sz="1200" dirty="0"/>
               <a:t>, pois se mostra uma inicialização bastante eficiente na maioria dos casos.</a:t>
             </a:r>
-          </a:p>
-        </p:txBody>
-      </p:sp>
-      <p:sp>
-        <p:nvSpPr>
-          <p:cNvPr id="7" name="Rectangle 3">
-            <a:extLst>
-              <a:ext uri="{FF2B5EF4-FFF2-40B4-BE49-F238E27FC236}">
-                <a16:creationId xmlns:a16="http://schemas.microsoft.com/office/drawing/2014/main" id="{01EE13AA-4AD8-9F6D-F5EF-5AFA3E373A03}"/>
-              </a:ext>
-            </a:extLst>
-          </p:cNvPr>
-          <p:cNvSpPr/>
-          <p:nvPr/>
-        </p:nvSpPr>
-        <p:spPr>
-          <a:xfrm>
-            <a:off x="9075906" y="6581001"/>
-            <a:ext cx="3116094" cy="276999"/>
-          </a:xfrm>
-          <a:prstGeom prst="rect">
-            <a:avLst/>
-          </a:prstGeom>
-        </p:spPr>
-        <p:txBody>
-          <a:bodyPr wrap="square">
-            <a:spAutoFit/>
-          </a:bodyPr>
-          <a:lstStyle/>
-          <a:p>
-            <a:r>
-              <a:rPr lang="pt-BR" sz="1200" dirty="0">
-                <a:hlinkClick r:id="rId5"/>
-              </a:rPr>
-              <a:t>[2] </a:t>
-            </a:r>
-            <a:r>
-              <a:rPr lang="en-US" sz="1200" dirty="0">
-                <a:hlinkClick r:id="rId5"/>
-              </a:rPr>
-              <a:t>How to find appropriate initialization values</a:t>
-            </a:r>
-            <a:endParaRPr lang="en-US" sz="1200" dirty="0"/>
           </a:p>
         </p:txBody>
       </p:sp>
@@ -12558,7 +12710,7 @@
           <p:cNvPr id="1026" name="Picture 2" descr="scikit-learn – Wikipédia, a enciclopédia livre">
             <a:extLst>
               <a:ext uri="{FF2B5EF4-FFF2-40B4-BE49-F238E27FC236}">
-                <a16:creationId xmlns:a16="http://schemas.microsoft.com/office/drawing/2014/main" id="{513F0B97-EA3C-F3BD-7E8A-DEEBB3FE3D5A}"/>
+                <a16:creationId xmlns:a16="http://schemas.microsoft.com/office/drawing/2014/main" xmlns="" id="{513F0B97-EA3C-F3BD-7E8A-DEEBB3FE3D5A}"/>
               </a:ext>
             </a:extLst>
           </p:cNvPr>
@@ -12841,7 +12993,23 @@
             </a:r>
             <a:r>
               <a:rPr lang="pt-BR" dirty="0"/>
-              <a:t>escaláveis, muito mais rápidos, flexíveis e baseados em GPU, devemos utilizar bibliotecas como:</a:t>
+              <a:t>escaláveis, </a:t>
+            </a:r>
+            <a:r>
+              <a:rPr lang="pt-BR" dirty="0" smtClean="0"/>
+              <a:t>flexíveis, muito </a:t>
+            </a:r>
+            <a:r>
+              <a:rPr lang="pt-BR" dirty="0"/>
+              <a:t>mais </a:t>
+            </a:r>
+            <a:r>
+              <a:rPr lang="pt-BR" dirty="0" smtClean="0"/>
+              <a:t>rápidos e </a:t>
+            </a:r>
+            <a:r>
+              <a:rPr lang="pt-BR" dirty="0"/>
+              <a:t>baseados em GPU, devemos utilizar bibliotecas como:</a:t>
             </a:r>
           </a:p>
           <a:p>
@@ -12914,10 +13082,34 @@
               <a:buChar char="§"/>
             </a:pPr>
             <a:r>
-              <a:rPr lang="pt-BR" b="1" i="1" dirty="0" err="1"/>
+              <a:rPr lang="pt-BR" b="1" i="1" dirty="0" err="1" smtClean="0"/>
               <a:t>Matlab</a:t>
             </a:r>
-            <a:endParaRPr lang="pt-BR" b="1" i="1" dirty="0"/>
+            <a:r>
+              <a:rPr lang="pt-BR" dirty="0"/>
+              <a:t>:</a:t>
+            </a:r>
+            <a:r>
+              <a:rPr lang="pt-BR" dirty="0"/>
+              <a:t> </a:t>
+            </a:r>
+            <a:r>
+              <a:rPr lang="pt-BR" dirty="0" smtClean="0"/>
+              <a:t>criada </a:t>
+            </a:r>
+            <a:r>
+              <a:rPr lang="pt-BR" dirty="0"/>
+              <a:t>pela </a:t>
+            </a:r>
+            <a:r>
+              <a:rPr lang="pt-BR" dirty="0" err="1"/>
+              <a:t>Mathworks</a:t>
+            </a:r>
+            <a:r>
+              <a:rPr lang="pt-BR" dirty="0"/>
+              <a:t>.</a:t>
+            </a:r>
+            <a:endParaRPr lang="pt-BR" dirty="0"/>
           </a:p>
           <a:p>
             <a:pPr lvl="1">
@@ -13096,8 +13288,39 @@
             </a:r>
             <a:r>
               <a:rPr lang="pt-BR" dirty="0"/>
-              <a:t>” que se encontra no MS Teams.</a:t>
-            </a:r>
+              <a:t>” que se encontra no MS </a:t>
+            </a:r>
+            <a:r>
+              <a:rPr lang="pt-BR" dirty="0" err="1"/>
+              <a:t>Teams</a:t>
+            </a:r>
+            <a:r>
+              <a:rPr lang="pt-BR" dirty="0" smtClean="0"/>
+              <a:t>.</a:t>
+            </a:r>
+          </a:p>
+          <a:p>
+            <a:r>
+              <a:rPr lang="pt-BR" b="1" dirty="0" smtClean="0"/>
+              <a:t>Avaliação presencial</a:t>
+            </a:r>
+            <a:r>
+              <a:rPr lang="pt-BR" dirty="0" smtClean="0"/>
+              <a:t>: </a:t>
+            </a:r>
+            <a:r>
+              <a:rPr lang="pt-BR" b="1" dirty="0" smtClean="0">
+                <a:solidFill>
+                  <a:srgbClr val="7030A0"/>
+                </a:solidFill>
+              </a:rPr>
+              <a:t>06/06/2026</a:t>
+            </a:r>
+            <a:r>
+              <a:rPr lang="pt-BR" dirty="0" smtClean="0"/>
+              <a:t> às 10:00 na sala I-18.</a:t>
+            </a:r>
+            <a:endParaRPr lang="pt-BR" dirty="0"/>
           </a:p>
           <a:p>
             <a:r>
@@ -13121,26 +13344,39 @@
             </a:r>
             <a:r>
               <a:rPr lang="pt-BR" dirty="0"/>
-              <a:t> e pode ser feito em grupos de no máximo 3 alunos.</a:t>
-            </a:r>
+              <a:t> e pode ser feito em grupos de no máximo 3 alunos</a:t>
+            </a:r>
+            <a:r>
+              <a:rPr lang="pt-BR" dirty="0" smtClean="0"/>
+              <a:t>.</a:t>
+            </a:r>
+            <a:endParaRPr lang="pt-BR" b="1" dirty="0" smtClean="0"/>
           </a:p>
           <a:p>
             <a:pPr lvl="1"/>
             <a:r>
-              <a:rPr lang="pt-BR" b="1" dirty="0"/>
+              <a:rPr lang="pt-BR" b="1" dirty="0" smtClean="0"/>
               <a:t>Entrega</a:t>
             </a:r>
             <a:r>
-              <a:rPr lang="pt-BR"/>
+              <a:rPr lang="pt-BR" dirty="0"/>
               <a:t>: </a:t>
             </a:r>
             <a:r>
-              <a:rPr lang="pt-BR" b="1">
+              <a:rPr lang="pt-BR" b="1" dirty="0" smtClean="0">
                 <a:solidFill>
                   <a:srgbClr val="00B050"/>
                 </a:solidFill>
               </a:rPr>
-              <a:t>07/12/2025 </a:t>
+              <a:t>28</a:t>
+            </a:r>
+            <a:r>
+              <a:rPr lang="pt-BR" b="1" dirty="0" smtClean="0">
+                <a:solidFill>
+                  <a:srgbClr val="00B050"/>
+                </a:solidFill>
+              </a:rPr>
+              <a:t>/06/2026 </a:t>
             </a:r>
             <a:r>
               <a:rPr lang="pt-BR" b="1" dirty="0">
@@ -13217,7 +13453,7 @@
           <p:cNvPr id="4" name="Título 1">
             <a:extLst>
               <a:ext uri="{FF2B5EF4-FFF2-40B4-BE49-F238E27FC236}">
-                <a16:creationId xmlns:a16="http://schemas.microsoft.com/office/drawing/2014/main" id="{32666AC8-2E17-4DB4-B0F5-60C640CCFD2E}"/>
+                <a16:creationId xmlns:a16="http://schemas.microsoft.com/office/drawing/2014/main" xmlns="" id="{32666AC8-2E17-4DB4-B0F5-60C640CCFD2E}"/>
               </a:ext>
             </a:extLst>
           </p:cNvPr>
@@ -13576,7 +13812,7 @@
           <p:cNvPr id="4" name="Título 1">
             <a:extLst>
               <a:ext uri="{FF2B5EF4-FFF2-40B4-BE49-F238E27FC236}">
-                <a16:creationId xmlns:a16="http://schemas.microsoft.com/office/drawing/2014/main" id="{32666AC8-2E17-4DB4-B0F5-60C640CCFD2E}"/>
+                <a16:creationId xmlns:a16="http://schemas.microsoft.com/office/drawing/2014/main" xmlns="" id="{32666AC8-2E17-4DB4-B0F5-60C640CCFD2E}"/>
               </a:ext>
             </a:extLst>
           </p:cNvPr>
@@ -17798,7 +18034,7 @@
           <p:cNvPr id="6" name="CaixaDeTexto 5">
             <a:extLst>
               <a:ext uri="{FF2B5EF4-FFF2-40B4-BE49-F238E27FC236}">
-                <a16:creationId xmlns:a16="http://schemas.microsoft.com/office/drawing/2014/main" id="{928286F3-4B05-CDE5-AEF5-5B1222276419}"/>
+                <a16:creationId xmlns:a16="http://schemas.microsoft.com/office/drawing/2014/main" xmlns="" id="{928286F3-4B05-CDE5-AEF5-5B1222276419}"/>
               </a:ext>
             </a:extLst>
           </p:cNvPr>
@@ -17864,7 +18100,7 @@
           <p:cNvPr id="2" name="Título 1">
             <a:extLst>
               <a:ext uri="{FF2B5EF4-FFF2-40B4-BE49-F238E27FC236}">
-                <a16:creationId xmlns:a16="http://schemas.microsoft.com/office/drawing/2014/main" id="{914C689F-B335-5924-6D61-297EEE64EAD8}"/>
+                <a16:creationId xmlns:a16="http://schemas.microsoft.com/office/drawing/2014/main" xmlns="" id="{914C689F-B335-5924-6D61-297EEE64EAD8}"/>
               </a:ext>
             </a:extLst>
           </p:cNvPr>
@@ -17892,7 +18128,7 @@
           <p:cNvPr id="3" name="Espaço Reservado para Conteúdo 2">
             <a:extLst>
               <a:ext uri="{FF2B5EF4-FFF2-40B4-BE49-F238E27FC236}">
-                <a16:creationId xmlns:a16="http://schemas.microsoft.com/office/drawing/2014/main" id="{E71BC374-E2D1-A6D7-D637-C334606B8C07}"/>
+                <a16:creationId xmlns:a16="http://schemas.microsoft.com/office/drawing/2014/main" xmlns="" id="{E71BC374-E2D1-A6D7-D637-C334606B8C07}"/>
               </a:ext>
             </a:extLst>
           </p:cNvPr>
@@ -18059,7 +18295,7 @@
           <p:cNvPr id="2" name="Título 1">
             <a:extLst>
               <a:ext uri="{FF2B5EF4-FFF2-40B4-BE49-F238E27FC236}">
-                <a16:creationId xmlns:a16="http://schemas.microsoft.com/office/drawing/2014/main" id="{54FC3986-5B4F-F3A1-9727-17D27F12CAE4}"/>
+                <a16:creationId xmlns:a16="http://schemas.microsoft.com/office/drawing/2014/main" xmlns="" id="{54FC3986-5B4F-F3A1-9727-17D27F12CAE4}"/>
               </a:ext>
             </a:extLst>
           </p:cNvPr>
@@ -18087,7 +18323,7 @@
           <p:cNvPr id="3" name="Espaço Reservado para Conteúdo 2">
             <a:extLst>
               <a:ext uri="{FF2B5EF4-FFF2-40B4-BE49-F238E27FC236}">
-                <a16:creationId xmlns:a16="http://schemas.microsoft.com/office/drawing/2014/main" id="{D33643CF-D78C-5854-1EB8-6FA35C52B131}"/>
+                <a16:creationId xmlns:a16="http://schemas.microsoft.com/office/drawing/2014/main" xmlns="" id="{D33643CF-D78C-5854-1EB8-6FA35C52B131}"/>
               </a:ext>
             </a:extLst>
           </p:cNvPr>
@@ -18236,7 +18472,7 @@
           <p:cNvPr id="2" name="Título 1">
             <a:extLst>
               <a:ext uri="{FF2B5EF4-FFF2-40B4-BE49-F238E27FC236}">
-                <a16:creationId xmlns:a16="http://schemas.microsoft.com/office/drawing/2014/main" id="{76A5DDE3-7807-E307-74B4-24A0E2C39C94}"/>
+                <a16:creationId xmlns:a16="http://schemas.microsoft.com/office/drawing/2014/main" xmlns="" id="{76A5DDE3-7807-E307-74B4-24A0E2C39C94}"/>
               </a:ext>
             </a:extLst>
           </p:cNvPr>
@@ -18264,7 +18500,7 @@
           <p:cNvPr id="3" name="Espaço Reservado para Conteúdo 2">
             <a:extLst>
               <a:ext uri="{FF2B5EF4-FFF2-40B4-BE49-F238E27FC236}">
-                <a16:creationId xmlns:a16="http://schemas.microsoft.com/office/drawing/2014/main" id="{9CBCA785-9755-4721-BCE7-A5C63D422F39}"/>
+                <a16:creationId xmlns:a16="http://schemas.microsoft.com/office/drawing/2014/main" xmlns="" id="{9CBCA785-9755-4721-BCE7-A5C63D422F39}"/>
               </a:ext>
             </a:extLst>
           </p:cNvPr>
@@ -18329,7 +18565,7 @@
           <p:cNvPr id="13" name="Picture 5">
             <a:extLst>
               <a:ext uri="{FF2B5EF4-FFF2-40B4-BE49-F238E27FC236}">
-                <a16:creationId xmlns:a16="http://schemas.microsoft.com/office/drawing/2014/main" id="{2A26D7AB-E420-270D-36AF-17B866CF1390}"/>
+                <a16:creationId xmlns:a16="http://schemas.microsoft.com/office/drawing/2014/main" xmlns="" id="{2A26D7AB-E420-270D-36AF-17B866CF1390}"/>
               </a:ext>
             </a:extLst>
           </p:cNvPr>
@@ -18364,7 +18600,7 @@
           <p:cNvPr id="14" name="Picture 6">
             <a:extLst>
               <a:ext uri="{FF2B5EF4-FFF2-40B4-BE49-F238E27FC236}">
-                <a16:creationId xmlns:a16="http://schemas.microsoft.com/office/drawing/2014/main" id="{3686CA23-8BC8-4A36-A353-67FAF35670FE}"/>
+                <a16:creationId xmlns:a16="http://schemas.microsoft.com/office/drawing/2014/main" xmlns="" id="{3686CA23-8BC8-4A36-A353-67FAF35670FE}"/>
               </a:ext>
             </a:extLst>
           </p:cNvPr>
@@ -18399,7 +18635,7 @@
           <p:cNvPr id="15" name="Right Arrow 7">
             <a:extLst>
               <a:ext uri="{FF2B5EF4-FFF2-40B4-BE49-F238E27FC236}">
-                <a16:creationId xmlns:a16="http://schemas.microsoft.com/office/drawing/2014/main" id="{AC9091B3-9D80-EDD9-8174-2A7E0E6EFD0D}"/>
+                <a16:creationId xmlns:a16="http://schemas.microsoft.com/office/drawing/2014/main" xmlns="" id="{AC9091B3-9D80-EDD9-8174-2A7E0E6EFD0D}"/>
               </a:ext>
             </a:extLst>
           </p:cNvPr>
@@ -18475,7 +18711,7 @@
           <p:cNvPr id="2" name="Título 1">
             <a:extLst>
               <a:ext uri="{FF2B5EF4-FFF2-40B4-BE49-F238E27FC236}">
-                <a16:creationId xmlns:a16="http://schemas.microsoft.com/office/drawing/2014/main" id="{8991D2F2-AAB6-0340-EC2D-F09F0833B92D}"/>
+                <a16:creationId xmlns:a16="http://schemas.microsoft.com/office/drawing/2014/main" xmlns="" id="{8991D2F2-AAB6-0340-EC2D-F09F0833B92D}"/>
               </a:ext>
             </a:extLst>
           </p:cNvPr>
@@ -18505,7 +18741,7 @@
               <p:cNvPr id="3" name="Espaço Reservado para Conteúdo 2">
                 <a:extLst>
                   <a:ext uri="{FF2B5EF4-FFF2-40B4-BE49-F238E27FC236}">
-                    <a16:creationId xmlns:a16="http://schemas.microsoft.com/office/drawing/2014/main" id="{CCB2D48A-2E61-4FF7-D003-586959C6379D}"/>
+                    <a16:creationId xmlns:a16="http://schemas.microsoft.com/office/drawing/2014/main" xmlns="" id="{CCB2D48A-2E61-4FF7-D003-586959C6379D}"/>
                   </a:ext>
                 </a:extLst>
               </p:cNvPr>
@@ -19006,7 +19242,7 @@
           <p:cNvPr id="4" name="Picture 4">
             <a:extLst>
               <a:ext uri="{FF2B5EF4-FFF2-40B4-BE49-F238E27FC236}">
-                <a16:creationId xmlns:a16="http://schemas.microsoft.com/office/drawing/2014/main" id="{72677C2B-6CE8-F2F2-378E-522A50FA8473}"/>
+                <a16:creationId xmlns:a16="http://schemas.microsoft.com/office/drawing/2014/main" xmlns="" id="{72677C2B-6CE8-F2F2-378E-522A50FA8473}"/>
               </a:ext>
             </a:extLst>
           </p:cNvPr>
@@ -19037,7 +19273,7 @@
               <p:cNvPr id="5" name="TextBox 3">
                 <a:extLst>
                   <a:ext uri="{FF2B5EF4-FFF2-40B4-BE49-F238E27FC236}">
-                    <a16:creationId xmlns:a16="http://schemas.microsoft.com/office/drawing/2014/main" id="{C38D1084-003D-A784-6650-7A60F951F7BD}"/>
+                    <a16:creationId xmlns:a16="http://schemas.microsoft.com/office/drawing/2014/main" xmlns="" id="{C38D1084-003D-A784-6650-7A60F951F7BD}"/>
                   </a:ext>
                 </a:extLst>
               </p:cNvPr>
@@ -19319,7 +19555,7 @@
           <p:cNvPr id="6" name="Picture 5">
             <a:extLst>
               <a:ext uri="{FF2B5EF4-FFF2-40B4-BE49-F238E27FC236}">
-                <a16:creationId xmlns:a16="http://schemas.microsoft.com/office/drawing/2014/main" id="{47B3DC33-DE3B-14FE-6752-885F09AC78A4}"/>
+                <a16:creationId xmlns:a16="http://schemas.microsoft.com/office/drawing/2014/main" xmlns="" id="{47B3DC33-DE3B-14FE-6752-885F09AC78A4}"/>
               </a:ext>
             </a:extLst>
           </p:cNvPr>
@@ -19354,7 +19590,7 @@
           <p:cNvPr id="7" name="Picture 6">
             <a:extLst>
               <a:ext uri="{FF2B5EF4-FFF2-40B4-BE49-F238E27FC236}">
-                <a16:creationId xmlns:a16="http://schemas.microsoft.com/office/drawing/2014/main" id="{92599078-F33D-664B-B465-9AF8B104C7E5}"/>
+                <a16:creationId xmlns:a16="http://schemas.microsoft.com/office/drawing/2014/main" xmlns="" id="{92599078-F33D-664B-B465-9AF8B104C7E5}"/>
               </a:ext>
             </a:extLst>
           </p:cNvPr>
@@ -19389,7 +19625,7 @@
           <p:cNvPr id="8" name="Right Arrow 7">
             <a:extLst>
               <a:ext uri="{FF2B5EF4-FFF2-40B4-BE49-F238E27FC236}">
-                <a16:creationId xmlns:a16="http://schemas.microsoft.com/office/drawing/2014/main" id="{8D3E96B6-8522-56BE-3C86-6605E2144017}"/>
+                <a16:creationId xmlns:a16="http://schemas.microsoft.com/office/drawing/2014/main" xmlns="" id="{8D3E96B6-8522-56BE-3C86-6605E2144017}"/>
               </a:ext>
             </a:extLst>
           </p:cNvPr>
